--- a/media/resources/files/Onduktar_KoboytuuIntroSabak_rYMq5Nj.pptx
+++ b/media/resources/files/Onduktar_KoboytuuIntroSabak_rYMq5Nj.pptx
@@ -33353,7 +33353,7 @@
                 <a:ea typeface="+mn-ea"/>
                 <a:cs typeface="+mn-cs"/>
               </a:rPr>
-              <a:t>Турдуу пикирлер учун ыраазычылык билдиребиз.</a:t>
+              <a:t>Түрдүү пикирлер үчүн ыраазычылык билдиребиз.</a:t>
             </a:r>
           </a:p>
           <a:p>

--- a/media/resources/files/Onduktar_KoboytuuIntroSabak_rYMq5Nj.pptx
+++ b/media/resources/files/Onduktar_KoboytuuIntroSabak_rYMq5Nj.pptx
@@ -7843,7 +7843,7 @@
           <a:p>
             <a:r>
               <a:rPr lang="ru-RU" dirty="0"/>
-              <a:t>Бул ресурс математикалык ыкманын жандуу демонстрацияларын камсыз кылат.</a:t>
+              <a:t>Бул ресурс ыкманы жандуу көрсөтөт.</a:t>
             </a:r>
           </a:p>
           <a:p>
@@ -8064,7 +8064,7 @@
             <a:pPr algn="r"/>
             <a:r>
               <a:rPr lang="en-GB" sz="3200" dirty="0"/>
-              <a:t>0.16</a:t>
+              <a:t>0,16</a:t>
             </a:r>
           </a:p>
         </p:txBody>
@@ -8099,7 +8099,7 @@
           <a:p>
             <a:r>
               <a:rPr lang="en-GB" sz="3200" dirty="0"/>
-              <a:t>= 0.8</a:t>
+              <a:t>= 0,8</a:t>
             </a:r>
           </a:p>
         </p:txBody>
@@ -8627,7 +8627,7 @@
             <a:pPr algn="ctr"/>
             <a:r>
               <a:rPr lang="en-GB" sz="3200" dirty="0"/>
-              <a:t>0.8</a:t>
+              <a:t>0,8</a:t>
             </a:r>
           </a:p>
         </p:txBody>
@@ -9712,7 +9712,7 @@
             <a:pPr algn="r"/>
             <a:r>
               <a:rPr lang="en-GB" sz="3200" dirty="0"/>
-              <a:t>1.5</a:t>
+              <a:t>1,5</a:t>
             </a:r>
           </a:p>
         </p:txBody>
@@ -9747,7 +9747,7 @@
           <a:p>
             <a:r>
               <a:rPr lang="en-GB" sz="3200" dirty="0"/>
-              <a:t>= 1.8</a:t>
+              <a:t>= 1,8</a:t>
             </a:r>
           </a:p>
         </p:txBody>
@@ -10102,7 +10102,7 @@
             <a:pPr algn="ctr"/>
             <a:r>
               <a:rPr lang="en-GB" sz="3200" dirty="0"/>
-              <a:t>1.8</a:t>
+              <a:t>1,8</a:t>
             </a:r>
           </a:p>
         </p:txBody>
@@ -10174,7 +10174,7 @@
             <a:pPr algn="ctr"/>
             <a:r>
               <a:rPr lang="en-GB" sz="3200" dirty="0"/>
-              <a:t>1.2</a:t>
+              <a:t>1,2</a:t>
             </a:r>
           </a:p>
         </p:txBody>
@@ -11399,7 +11399,7 @@
             <a:pPr algn="r"/>
             <a:r>
               <a:rPr lang="en-GB" sz="3200" dirty="0"/>
-              <a:t>2.3</a:t>
+              <a:t>2,3</a:t>
             </a:r>
           </a:p>
         </p:txBody>
@@ -11434,7 +11434,7 @@
           <a:p>
             <a:r>
               <a:rPr lang="en-GB" sz="3200" dirty="0"/>
-              <a:t>= 1.38</a:t>
+              <a:t>= 1,38</a:t>
             </a:r>
           </a:p>
         </p:txBody>
@@ -11794,7 +11794,7 @@
             <a:pPr algn="ctr"/>
             <a:r>
               <a:rPr lang="en-GB" sz="3200" dirty="0"/>
-              <a:t>1.38</a:t>
+              <a:t>1,38</a:t>
             </a:r>
           </a:p>
         </p:txBody>
@@ -11866,7 +11866,7 @@
             <a:pPr algn="ctr"/>
             <a:r>
               <a:rPr lang="en-GB" sz="3200" dirty="0"/>
-              <a:t>0.6</a:t>
+              <a:t>0,6</a:t>
             </a:r>
           </a:p>
         </p:txBody>
@@ -13091,7 +13091,7 @@
             <a:pPr algn="r"/>
             <a:r>
               <a:rPr lang="en-GB" sz="3200" dirty="0"/>
-              <a:t>2.3</a:t>
+              <a:t>2,3</a:t>
             </a:r>
           </a:p>
         </p:txBody>
@@ -13126,7 +13126,7 @@
           <a:p>
             <a:r>
               <a:rPr lang="en-GB" sz="3200" dirty="0"/>
-              <a:t>= 1.38</a:t>
+              <a:t>= 1,38</a:t>
             </a:r>
           </a:p>
         </p:txBody>
@@ -13526,7 +13526,7 @@
             <a:pPr algn="ctr"/>
             <a:r>
               <a:rPr lang="en-GB" sz="3200" dirty="0"/>
-              <a:t>1.38</a:t>
+              <a:t>1,38</a:t>
             </a:r>
           </a:p>
         </p:txBody>
@@ -13598,7 +13598,7 @@
             <a:pPr algn="ctr"/>
             <a:r>
               <a:rPr lang="en-GB" sz="3200" dirty="0"/>
-              <a:t>0.6</a:t>
+              <a:t>0,6</a:t>
             </a:r>
           </a:p>
         </p:txBody>
@@ -13790,7 +13790,7 @@
             <a:pPr algn="r"/>
             <a:r>
               <a:rPr lang="en-GB" sz="3200" dirty="0"/>
-              <a:t>0.7</a:t>
+              <a:t>0,7</a:t>
             </a:r>
           </a:p>
         </p:txBody>
@@ -13825,7 +13825,7 @@
           <a:p>
             <a:r>
               <a:rPr lang="en-GB" sz="3200" dirty="0"/>
-              <a:t>= 0.35</a:t>
+              <a:t>= 0,35</a:t>
             </a:r>
           </a:p>
         </p:txBody>
@@ -14140,7 +14140,7 @@
             <a:pPr algn="ctr"/>
             <a:r>
               <a:rPr lang="en-GB" sz="3200" dirty="0"/>
-              <a:t>0.35</a:t>
+              <a:t>0,35</a:t>
             </a:r>
           </a:p>
         </p:txBody>
@@ -14212,7 +14212,7 @@
             <a:pPr algn="ctr"/>
             <a:r>
               <a:rPr lang="en-GB" sz="3200" dirty="0"/>
-              <a:t>0.5</a:t>
+              <a:t>0,5</a:t>
             </a:r>
           </a:p>
         </p:txBody>
@@ -15437,7 +15437,7 @@
             <a:pPr algn="r"/>
             <a:r>
               <a:rPr lang="en-GB" sz="3200" dirty="0"/>
-              <a:t>2.3</a:t>
+              <a:t>2,3</a:t>
             </a:r>
           </a:p>
         </p:txBody>
@@ -15472,7 +15472,7 @@
           <a:p>
             <a:r>
               <a:rPr lang="en-GB" sz="3200" dirty="0"/>
-              <a:t>= 1.38</a:t>
+              <a:t>= 1,38</a:t>
             </a:r>
           </a:p>
         </p:txBody>
@@ -15872,7 +15872,7 @@
             <a:pPr algn="ctr"/>
             <a:r>
               <a:rPr lang="en-GB" sz="3200" dirty="0"/>
-              <a:t>1.38</a:t>
+              <a:t>1,38</a:t>
             </a:r>
           </a:p>
         </p:txBody>
@@ -15944,7 +15944,7 @@
             <a:pPr algn="ctr"/>
             <a:r>
               <a:rPr lang="en-GB" sz="3200" dirty="0"/>
-              <a:t>0.6</a:t>
+              <a:t>0,6</a:t>
             </a:r>
           </a:p>
         </p:txBody>
@@ -16136,7 +16136,7 @@
             <a:pPr algn="r"/>
             <a:r>
               <a:rPr lang="en-GB" sz="3200" dirty="0"/>
-              <a:t>1.3</a:t>
+              <a:t>1,3</a:t>
             </a:r>
           </a:p>
         </p:txBody>
@@ -16171,7 +16171,7 @@
           <a:p>
             <a:r>
               <a:rPr lang="en-GB" sz="3200" dirty="0"/>
-              <a:t>= 0.91</a:t>
+              <a:t>= 0,91</a:t>
             </a:r>
           </a:p>
         </p:txBody>
@@ -16486,7 +16486,7 @@
             <a:pPr algn="ctr"/>
             <a:r>
               <a:rPr lang="en-GB" sz="3200" dirty="0"/>
-              <a:t>0.91</a:t>
+              <a:t>0,91</a:t>
             </a:r>
           </a:p>
         </p:txBody>
@@ -16558,7 +16558,7 @@
             <a:pPr algn="ctr"/>
             <a:r>
               <a:rPr lang="en-GB" sz="3200" dirty="0"/>
-              <a:t>0.7</a:t>
+              <a:t>0,7</a:t>
             </a:r>
           </a:p>
         </p:txBody>
@@ -17783,7 +17783,7 @@
             <a:pPr algn="r"/>
             <a:r>
               <a:rPr lang="en-GB" sz="3200" dirty="0"/>
-              <a:t>0.17</a:t>
+              <a:t>0,17</a:t>
             </a:r>
           </a:p>
         </p:txBody>
@@ -17818,7 +17818,7 @@
           <a:p>
             <a:r>
               <a:rPr lang="en-GB" sz="3200" dirty="0"/>
-              <a:t>= 0.068</a:t>
+              <a:t>= 0,068</a:t>
             </a:r>
           </a:p>
         </p:txBody>
@@ -18213,7 +18213,7 @@
             <a:pPr algn="ctr"/>
             <a:r>
               <a:rPr lang="en-GB" sz="3200" dirty="0"/>
-              <a:t>0.068</a:t>
+              <a:t>0,068</a:t>
             </a:r>
           </a:p>
         </p:txBody>
@@ -18285,7 +18285,7 @@
             <a:pPr algn="ctr"/>
             <a:r>
               <a:rPr lang="en-GB" sz="3200" dirty="0"/>
-              <a:t>0.4</a:t>
+              <a:t>0,4</a:t>
             </a:r>
           </a:p>
         </p:txBody>
@@ -19622,7 +19622,7 @@
             <a:pPr algn="r"/>
             <a:r>
               <a:rPr lang="en-GB" sz="3200" dirty="0"/>
-              <a:t>0.35</a:t>
+              <a:t>0,35</a:t>
             </a:r>
           </a:p>
         </p:txBody>
@@ -19657,7 +19657,7 @@
           <a:p>
             <a:r>
               <a:rPr lang="en-GB" sz="3200" dirty="0"/>
-              <a:t>= 0.07</a:t>
+              <a:t>= 0,07</a:t>
             </a:r>
           </a:p>
         </p:txBody>
@@ -20057,7 +20057,7 @@
             <a:pPr algn="ctr"/>
             <a:r>
               <a:rPr lang="en-GB" sz="3200" dirty="0"/>
-              <a:t>0.07</a:t>
+              <a:t>0,07</a:t>
             </a:r>
           </a:p>
         </p:txBody>
@@ -20129,7 +20129,7 @@
             <a:pPr algn="ctr"/>
             <a:r>
               <a:rPr lang="en-GB" sz="3200" dirty="0"/>
-              <a:t>0.2</a:t>
+              <a:t>0,2</a:t>
             </a:r>
           </a:p>
         </p:txBody>
@@ -21466,7 +21466,7 @@
             <a:pPr algn="r"/>
             <a:r>
               <a:rPr lang="en-GB" sz="3200" dirty="0"/>
-              <a:t>0.35</a:t>
+              <a:t>0,35</a:t>
             </a:r>
           </a:p>
         </p:txBody>
@@ -21501,7 +21501,7 @@
           <a:p>
             <a:r>
               <a:rPr lang="en-GB" sz="3200" dirty="0"/>
-              <a:t>= 0.07</a:t>
+              <a:t>= 0,07</a:t>
             </a:r>
           </a:p>
         </p:txBody>
@@ -21936,7 +21936,7 @@
             <a:pPr algn="ctr"/>
             <a:r>
               <a:rPr lang="en-GB" sz="3200" dirty="0"/>
-              <a:t>0.07</a:t>
+              <a:t>0,07</a:t>
             </a:r>
           </a:p>
         </p:txBody>
@@ -22008,7 +22008,7 @@
             <a:pPr algn="ctr"/>
             <a:r>
               <a:rPr lang="en-GB" sz="3200" dirty="0"/>
-              <a:t>0.2</a:t>
+              <a:t>0,2</a:t>
             </a:r>
           </a:p>
         </p:txBody>
@@ -22240,7 +22240,7 @@
             <a:pPr algn="r"/>
             <a:r>
               <a:rPr lang="en-GB" sz="3200" dirty="0"/>
-              <a:t>0.26</a:t>
+              <a:t>0,26</a:t>
             </a:r>
           </a:p>
         </p:txBody>
@@ -22275,7 +22275,7 @@
           <a:p>
             <a:r>
               <a:rPr lang="en-GB" sz="3200" dirty="0"/>
-              <a:t>= 0.078</a:t>
+              <a:t>= 0,078</a:t>
             </a:r>
           </a:p>
         </p:txBody>
@@ -22630,7 +22630,7 @@
             <a:pPr algn="ctr"/>
             <a:r>
               <a:rPr lang="en-GB" sz="3200" dirty="0"/>
-              <a:t>0.078</a:t>
+              <a:t>0,078</a:t>
             </a:r>
           </a:p>
         </p:txBody>
@@ -22702,7 +22702,7 @@
             <a:pPr algn="ctr"/>
             <a:r>
               <a:rPr lang="en-GB" sz="3200" dirty="0"/>
-              <a:t>0.3</a:t>
+              <a:t>0,3</a:t>
             </a:r>
           </a:p>
         </p:txBody>
@@ -24039,7 +24039,7 @@
             <a:pPr algn="r"/>
             <a:r>
               <a:rPr lang="en-GB" sz="3200" dirty="0"/>
-              <a:t>0.35</a:t>
+              <a:t>0,35</a:t>
             </a:r>
           </a:p>
         </p:txBody>
@@ -24074,7 +24074,7 @@
           <a:p>
             <a:r>
               <a:rPr lang="en-GB" sz="3200" dirty="0"/>
-              <a:t>= 0.07</a:t>
+              <a:t>= 0,07</a:t>
             </a:r>
           </a:p>
         </p:txBody>
@@ -24514,7 +24514,7 @@
             <a:pPr algn="ctr"/>
             <a:r>
               <a:rPr lang="en-GB" sz="3200" dirty="0"/>
-              <a:t>0.07</a:t>
+              <a:t>0,07</a:t>
             </a:r>
           </a:p>
         </p:txBody>
@@ -24586,7 +24586,7 @@
             <a:pPr algn="ctr"/>
             <a:r>
               <a:rPr lang="en-GB" sz="3200" dirty="0"/>
-              <a:t>0.2</a:t>
+              <a:t>0,2</a:t>
             </a:r>
           </a:p>
         </p:txBody>
@@ -24818,7 +24818,7 @@
             <a:pPr algn="r"/>
             <a:r>
               <a:rPr lang="en-GB" sz="3200" dirty="0"/>
-              <a:t>0.42</a:t>
+              <a:t>0,42</a:t>
             </a:r>
           </a:p>
         </p:txBody>
@@ -24853,7 +24853,7 @@
           <a:p>
             <a:r>
               <a:rPr lang="en-GB" sz="3200" dirty="0"/>
-              <a:t>= 0.0168</a:t>
+              <a:t>= 0,0168</a:t>
             </a:r>
           </a:p>
         </p:txBody>
@@ -25208,7 +25208,7 @@
             <a:pPr algn="ctr"/>
             <a:r>
               <a:rPr lang="en-GB" sz="3200" dirty="0"/>
-              <a:t>0.0168</a:t>
+              <a:t>0,0168</a:t>
             </a:r>
           </a:p>
         </p:txBody>
@@ -25280,7 +25280,7 @@
             <a:pPr algn="ctr"/>
             <a:r>
               <a:rPr lang="en-GB" sz="3200" dirty="0"/>
-              <a:t>0.4</a:t>
+              <a:t>0,4</a:t>
             </a:r>
           </a:p>
         </p:txBody>
@@ -26660,7 +26660,7 @@
             </a:r>
             <a:r>
               <a:rPr lang="en-GB" sz="3200" dirty="0"/>
-              <a:t>)   1.5 × 0.8 = 1.2</a:t>
+              <a:t>)   1,5 × 0,8 = 1,2</a:t>
             </a:r>
           </a:p>
         </p:txBody>
@@ -26699,7 +26699,7 @@
             </a:r>
             <a:r>
               <a:rPr lang="en-GB" sz="3200" dirty="0"/>
-              <a:t>)   0.15 × 0.02 = 0.003</a:t>
+              <a:t>)   0,15 × 0,02 = 0,003</a:t>
             </a:r>
           </a:p>
         </p:txBody>
@@ -26738,7 +26738,7 @@
             </a:r>
             <a:r>
               <a:rPr lang="en-GB" sz="3200" dirty="0"/>
-              <a:t>)   0.06 × 0.08 = 0.0048</a:t>
+              <a:t>)   0,06 × 0,08 = 0,0048</a:t>
             </a:r>
           </a:p>
         </p:txBody>
@@ -26777,7 +26777,7 @@
             </a:r>
             <a:r>
               <a:rPr lang="en-GB" sz="3200" dirty="0"/>
-              <a:t>)   0.41 × 1.2 = 0.492</a:t>
+              <a:t>)   0,41 × 1,2 = 0,492</a:t>
             </a:r>
           </a:p>
         </p:txBody>
@@ -26816,7 +26816,7 @@
             </a:r>
             <a:r>
               <a:rPr lang="en-GB" sz="3200" dirty="0"/>
-              <a:t>)   5.2 × 0.14 = 0.728</a:t>
+              <a:t>)   5,2 × 0,14 = 0,728</a:t>
             </a:r>
           </a:p>
         </p:txBody>
@@ -26855,7 +26855,7 @@
             </a:r>
             <a:r>
               <a:rPr lang="en-GB" sz="3200" dirty="0"/>
-              <a:t>)   1.14 × 0.08 = 0.0912</a:t>
+              <a:t>)   1,14 × 0,08 = 0,0912</a:t>
             </a:r>
           </a:p>
         </p:txBody>
@@ -26894,7 +26894,7 @@
             </a:r>
             <a:r>
               <a:rPr lang="en-GB" sz="3200" dirty="0"/>
-              <a:t>)   2.44 × 0.26 = 0.6344</a:t>
+              <a:t>)   2,44 × 0,26 = 0,6344</a:t>
             </a:r>
           </a:p>
         </p:txBody>
@@ -27439,7 +27439,7 @@
             <a:pPr algn="r"/>
             <a:r>
               <a:rPr lang="en-GB" sz="3200" dirty="0"/>
-              <a:t>2.3</a:t>
+              <a:t>2,3</a:t>
             </a:r>
           </a:p>
         </p:txBody>
@@ -27474,7 +27474,7 @@
           <a:p>
             <a:r>
               <a:rPr lang="en-GB" sz="3200" dirty="0"/>
-              <a:t>= 1.38</a:t>
+              <a:t>= 1,38</a:t>
             </a:r>
           </a:p>
         </p:txBody>
@@ -27789,7 +27789,7 @@
             <a:pPr algn="ctr"/>
             <a:r>
               <a:rPr lang="en-GB" sz="3200" dirty="0"/>
-              <a:t>1.38</a:t>
+              <a:t>1,38</a:t>
             </a:r>
           </a:p>
         </p:txBody>
@@ -27861,7 +27861,7 @@
             <a:pPr algn="ctr"/>
             <a:r>
               <a:rPr lang="en-GB" sz="3200" dirty="0"/>
-              <a:t>0.6</a:t>
+              <a:t>0,6</a:t>
             </a:r>
           </a:p>
         </p:txBody>
@@ -30398,7 +30398,7 @@
             <a:pPr algn="r"/>
             <a:r>
               <a:rPr lang="en-GB" sz="4000" dirty="0"/>
-              <a:t>0.7 × 0.4 =</a:t>
+              <a:t>0,7 × 0,4 =</a:t>
             </a:r>
           </a:p>
         </p:txBody>
@@ -30560,7 +30560,7 @@
             <a:pPr algn="r"/>
             <a:r>
               <a:rPr lang="en-GB" sz="4000" dirty="0"/>
-              <a:t>0.28</a:t>
+              <a:t>0,28</a:t>
             </a:r>
           </a:p>
         </p:txBody>
@@ -31041,7 +31041,7 @@
             <a:pPr algn="r"/>
             <a:r>
               <a:rPr lang="en-GB" sz="4000" dirty="0"/>
-              <a:t>0.17 × 0.3 =</a:t>
+              <a:t>0,17 × 0,3 =</a:t>
             </a:r>
           </a:p>
         </p:txBody>
@@ -31203,7 +31203,7 @@
             <a:pPr algn="r"/>
             <a:r>
               <a:rPr lang="en-GB" sz="4000" dirty="0"/>
-              <a:t>0.051</a:t>
+              <a:t>0,051</a:t>
             </a:r>
           </a:p>
         </p:txBody>
@@ -31684,7 +31684,7 @@
             <a:pPr algn="r"/>
             <a:r>
               <a:rPr lang="en-GB" sz="4000" dirty="0"/>
-              <a:t>0.17 × 0.3 =</a:t>
+              <a:t>0,17 × 0,3 =</a:t>
             </a:r>
           </a:p>
         </p:txBody>
@@ -31810,7 +31810,7 @@
             <a:pPr algn="r"/>
             <a:r>
               <a:rPr lang="en-GB" sz="4000" dirty="0"/>
-              <a:t>0.051</a:t>
+              <a:t>0,051</a:t>
             </a:r>
           </a:p>
         </p:txBody>
@@ -32147,7 +32147,7 @@
             <a:pPr algn="r"/>
             <a:r>
               <a:rPr lang="en-GB" sz="3200" dirty="0"/>
-              <a:t>0.3 × 3 = 0.9</a:t>
+              <a:t>0,3 × 3 = 0,9</a:t>
             </a:r>
           </a:p>
         </p:txBody>
@@ -32183,7 +32183,7 @@
             <a:pPr algn="r"/>
             <a:r>
               <a:rPr lang="en-GB" sz="3200" dirty="0"/>
-              <a:t>5 × 0.5 = 2.5</a:t>
+              <a:t>5 × 0,5 = 2,5</a:t>
             </a:r>
           </a:p>
         </p:txBody>
@@ -32219,7 +32219,7 @@
             <a:pPr algn="r"/>
             <a:r>
               <a:rPr lang="en-GB" sz="3200" dirty="0"/>
-              <a:t>0.6 × 0.7 = 0.42</a:t>
+              <a:t>0,6 × 0,7 = 0,42</a:t>
             </a:r>
           </a:p>
         </p:txBody>
@@ -32255,7 +32255,7 @@
             <a:pPr algn="r"/>
             <a:r>
               <a:rPr lang="en-GB" sz="3200" dirty="0"/>
-              <a:t>0.21 × 0.7 = 0.147</a:t>
+              <a:t>0,21 × 0,7 = 0,147</a:t>
             </a:r>
           </a:p>
         </p:txBody>
@@ -32291,7 +32291,7 @@
             <a:pPr algn="r"/>
             <a:r>
               <a:rPr lang="en-GB" sz="3200" dirty="0"/>
-              <a:t>0.3 × 0.036 = 0.0108</a:t>
+              <a:t>0,3 × 0,036 = 0,0108</a:t>
             </a:r>
           </a:p>
         </p:txBody>
@@ -32327,7 +32327,7 @@
             <a:pPr algn="r"/>
             <a:r>
               <a:rPr lang="en-GB" sz="3200" dirty="0"/>
-              <a:t>0.5 × 0.13 = 0.065</a:t>
+              <a:t>0,5 × 0,13 = 0,065</a:t>
             </a:r>
           </a:p>
         </p:txBody>
@@ -33837,7 +33837,7 @@
             <a:pPr algn="r"/>
             <a:r>
               <a:rPr lang="en-GB" sz="3600" dirty="0"/>
-              <a:t>0.3 × 2 = </a:t>
+              <a:t>0,3 × 2 = </a:t>
             </a:r>
           </a:p>
         </p:txBody>
@@ -34012,7 +34012,7 @@
           <a:p>
             <a:r>
               <a:rPr lang="en-GB" sz="3600" dirty="0"/>
-              <a:t>0.6</a:t>
+              <a:t>0,6</a:t>
             </a:r>
           </a:p>
         </p:txBody>
@@ -34192,7 +34192,7 @@
             <a:pPr algn="r"/>
             <a:r>
               <a:rPr lang="en-GB" sz="3600" dirty="0"/>
-              <a:t>0.4 × 3 = </a:t>
+              <a:t>0,4 × 3 = </a:t>
             </a:r>
           </a:p>
         </p:txBody>
@@ -34367,7 +34367,7 @@
           <a:p>
             <a:r>
               <a:rPr lang="en-GB" sz="3600" dirty="0"/>
-              <a:t>1.2</a:t>
+              <a:t>1,2</a:t>
             </a:r>
           </a:p>
         </p:txBody>
@@ -35125,7 +35125,7 @@
             <a:pPr algn="r"/>
             <a:r>
               <a:rPr lang="en-GB" sz="3600" dirty="0"/>
-              <a:t>0.3 × 2 = </a:t>
+              <a:t>0,3 × 2 = </a:t>
             </a:r>
           </a:p>
         </p:txBody>
@@ -35300,7 +35300,7 @@
           <a:p>
             <a:r>
               <a:rPr lang="en-GB" sz="3600" dirty="0"/>
-              <a:t>0.6</a:t>
+              <a:t>0,6</a:t>
             </a:r>
           </a:p>
         </p:txBody>
@@ -36466,7 +36466,7 @@
             <a:pPr algn="r"/>
             <a:r>
               <a:rPr lang="en-GB" sz="3600" dirty="0"/>
-              <a:t>0.4 × 2 = </a:t>
+              <a:t>0,4 × 2 = </a:t>
             </a:r>
           </a:p>
         </p:txBody>
@@ -36608,7 +36608,7 @@
           <a:p>
             <a:r>
               <a:rPr lang="en-GB" sz="3600" dirty="0"/>
-              <a:t>0.8</a:t>
+              <a:t>0,8</a:t>
             </a:r>
           </a:p>
         </p:txBody>
@@ -36784,7 +36784,7 @@
             <a:pPr algn="r"/>
             <a:r>
               <a:rPr lang="en-GB" sz="3600" dirty="0"/>
-              <a:t>0.3 × 3 = </a:t>
+              <a:t>0,3 × 3 = </a:t>
             </a:r>
           </a:p>
         </p:txBody>
@@ -36889,7 +36889,7 @@
           <a:p>
             <a:r>
               <a:rPr lang="en-GB" sz="3600" dirty="0"/>
-              <a:t>0.9</a:t>
+              <a:t>0,9</a:t>
             </a:r>
           </a:p>
         </p:txBody>
@@ -37065,7 +37065,7 @@
             <a:pPr algn="r"/>
             <a:r>
               <a:rPr lang="en-GB" sz="3600" dirty="0"/>
-              <a:t>0.2 × 5 = </a:t>
+              <a:t>0,2 × 5 = </a:t>
             </a:r>
           </a:p>
         </p:txBody>
@@ -37346,7 +37346,7 @@
             <a:pPr algn="r"/>
             <a:r>
               <a:rPr lang="en-GB" sz="3600" dirty="0"/>
-              <a:t>0.7 × 3 = </a:t>
+              <a:t>0,7 × 3 = </a:t>
             </a:r>
           </a:p>
         </p:txBody>
@@ -37451,7 +37451,7 @@
           <a:p>
             <a:r>
               <a:rPr lang="en-GB" sz="3600" dirty="0"/>
-              <a:t>2.1</a:t>
+              <a:t>2,1</a:t>
             </a:r>
           </a:p>
         </p:txBody>
@@ -37945,7 +37945,7 @@
             <a:pPr algn="r"/>
             <a:r>
               <a:rPr lang="en-GB" sz="4000" dirty="0"/>
-              <a:t>4 × 0.2 =</a:t>
+              <a:t>4 × 0,2 =</a:t>
             </a:r>
           </a:p>
         </p:txBody>
@@ -37980,7 +37980,7 @@
           <a:p>
             <a:r>
               <a:rPr lang="en-GB" sz="4000" dirty="0"/>
-              <a:t>0.8</a:t>
+              <a:t>0,8</a:t>
             </a:r>
           </a:p>
         </p:txBody>
@@ -38171,7 +38171,7 @@
             <a:pPr algn="r"/>
             <a:r>
               <a:rPr lang="en-GB" sz="4000" dirty="0"/>
-              <a:t>0.4 × 0.2 =</a:t>
+              <a:t>0,4 × 0,2 =</a:t>
             </a:r>
           </a:p>
         </p:txBody>
@@ -38206,7 +38206,7 @@
           <a:p>
             <a:r>
               <a:rPr lang="en-GB" sz="4000" dirty="0"/>
-              <a:t>0.08</a:t>
+              <a:t>0,08</a:t>
             </a:r>
           </a:p>
         </p:txBody>
@@ -38644,7 +38644,7 @@
             <a:pPr algn="r"/>
             <a:r>
               <a:rPr lang="en-GB" sz="4000" dirty="0"/>
-              <a:t>7 × 0.3 =</a:t>
+              <a:t>7 × 0,3 =</a:t>
             </a:r>
           </a:p>
         </p:txBody>
@@ -38679,7 +38679,7 @@
           <a:p>
             <a:r>
               <a:rPr lang="en-GB" sz="4000" dirty="0"/>
-              <a:t>2.1</a:t>
+              <a:t>2,1</a:t>
             </a:r>
           </a:p>
         </p:txBody>
@@ -38865,7 +38865,7 @@
             <a:pPr algn="r"/>
             <a:r>
               <a:rPr lang="en-GB" sz="4000" dirty="0"/>
-              <a:t>0.7 × 0.7 =</a:t>
+              <a:t>0,7 × 0,7 =</a:t>
             </a:r>
           </a:p>
         </p:txBody>
@@ -38900,7 +38900,7 @@
           <a:p>
             <a:r>
               <a:rPr lang="en-GB" sz="4000" dirty="0"/>
-              <a:t>0.21</a:t>
+              <a:t>0,21</a:t>
             </a:r>
           </a:p>
         </p:txBody>
@@ -39338,7 +39338,7 @@
             <a:pPr algn="r"/>
             <a:r>
               <a:rPr lang="en-GB" sz="4000" dirty="0"/>
-              <a:t>8 × 0.9 =</a:t>
+              <a:t>8 × 0,9 =</a:t>
             </a:r>
           </a:p>
         </p:txBody>
@@ -39373,7 +39373,7 @@
           <a:p>
             <a:r>
               <a:rPr lang="en-GB" sz="4000" dirty="0"/>
-              <a:t>7.2</a:t>
+              <a:t>7,2</a:t>
             </a:r>
           </a:p>
         </p:txBody>
@@ -39559,7 +39559,7 @@
             <a:pPr algn="r"/>
             <a:r>
               <a:rPr lang="en-GB" sz="4000" dirty="0"/>
-              <a:t>0.8 × 0.9 =</a:t>
+              <a:t>0,8 × 0,9 =</a:t>
             </a:r>
           </a:p>
         </p:txBody>
@@ -39594,7 +39594,7 @@
           <a:p>
             <a:r>
               <a:rPr lang="en-GB" sz="4000" dirty="0"/>
-              <a:t>0.72</a:t>
+              <a:t>0,72</a:t>
             </a:r>
           </a:p>
         </p:txBody>
@@ -40232,7 +40232,7 @@
             <a:pPr algn="r"/>
             <a:r>
               <a:rPr lang="en-GB" sz="3200" dirty="0"/>
-              <a:t>2.4</a:t>
+              <a:t>2,4</a:t>
             </a:r>
           </a:p>
         </p:txBody>
@@ -40267,7 +40267,7 @@
           <a:p>
             <a:r>
               <a:rPr lang="en-GB" sz="3200" dirty="0"/>
-              <a:t>= 7.2</a:t>
+              <a:t>= 7,2</a:t>
             </a:r>
           </a:p>
         </p:txBody>
@@ -40662,7 +40662,7 @@
             <a:pPr algn="ctr"/>
             <a:r>
               <a:rPr lang="en-GB" sz="3200" dirty="0"/>
-              <a:t>7.2</a:t>
+              <a:t>7,2</a:t>
             </a:r>
           </a:p>
         </p:txBody>

--- a/media/resources/files/Onduktar_KoboytuuIntroSabak_rYMq5Nj.pptx
+++ b/media/resources/files/Onduktar_KoboytuuIntroSabak_rYMq5Nj.pptx
@@ -34332,7 +34332,7 @@
           <a:p>
             <a:r>
               <a:rPr lang="en-GB" sz="3600" dirty="0"/>
-              <a:t>12000</a:t>
+              <a:t>12 000</a:t>
             </a:r>
           </a:p>
         </p:txBody>
